--- a/youtube_short_20260531.pptx
+++ b/youtube_short_20260531.pptx
@@ -3356,6 +3356,30 @@
           </a:p>
         </p:txBody>
       </p:sp>
+      <p:pic>
+        <p:nvPicPr>
+          <p:cNvPr id="9" name="Picture 8" descr="zundamon-an.gif"/>
+          <p:cNvPicPr>
+            <a:picLocks noChangeAspect="1"/>
+          </p:cNvPicPr>
+          <p:nvPr/>
+        </p:nvPicPr>
+        <p:blipFill>
+          <a:blip r:embed="rId2"/>
+          <a:stretch>
+            <a:fillRect/>
+          </a:stretch>
+        </p:blipFill>
+        <p:spPr>
+          <a:xfrm>
+            <a:off x="3429000" y="7699248"/>
+            <a:ext cx="2011680" cy="2011680"/>
+          </a:xfrm>
+          <a:prstGeom prst="rect">
+            <a:avLst/>
+          </a:prstGeom>
+        </p:spPr>
+      </p:pic>
     </p:spTree>
   </p:cSld>
   <p:clrMapOvr>
@@ -3640,6 +3664,30 @@
           </a:p>
         </p:txBody>
       </p:sp>
+      <p:pic>
+        <p:nvPicPr>
+          <p:cNvPr id="10" name="Picture 9" descr="zundamon-an.gif"/>
+          <p:cNvPicPr>
+            <a:picLocks noChangeAspect="1"/>
+          </p:cNvPicPr>
+          <p:nvPr/>
+        </p:nvPicPr>
+        <p:blipFill>
+          <a:blip r:embed="rId4"/>
+          <a:stretch>
+            <a:fillRect/>
+          </a:stretch>
+        </p:blipFill>
+        <p:spPr>
+          <a:xfrm>
+            <a:off x="3429000" y="7699248"/>
+            <a:ext cx="2011680" cy="2011680"/>
+          </a:xfrm>
+          <a:prstGeom prst="rect">
+            <a:avLst/>
+          </a:prstGeom>
+        </p:spPr>
+      </p:pic>
     </p:spTree>
   </p:cSld>
   <p:clrMapOvr>
@@ -3924,6 +3972,30 @@
           </a:p>
         </p:txBody>
       </p:sp>
+      <p:pic>
+        <p:nvPicPr>
+          <p:cNvPr id="10" name="Picture 9" descr="zundamon-an.gif"/>
+          <p:cNvPicPr>
+            <a:picLocks noChangeAspect="1"/>
+          </p:cNvPicPr>
+          <p:nvPr/>
+        </p:nvPicPr>
+        <p:blipFill>
+          <a:blip r:embed="rId4"/>
+          <a:stretch>
+            <a:fillRect/>
+          </a:stretch>
+        </p:blipFill>
+        <p:spPr>
+          <a:xfrm>
+            <a:off x="3429000" y="7699248"/>
+            <a:ext cx="2011680" cy="2011680"/>
+          </a:xfrm>
+          <a:prstGeom prst="rect">
+            <a:avLst/>
+          </a:prstGeom>
+        </p:spPr>
+      </p:pic>
     </p:spTree>
   </p:cSld>
   <p:clrMapOvr>
@@ -4208,6 +4280,30 @@
           </a:p>
         </p:txBody>
       </p:sp>
+      <p:pic>
+        <p:nvPicPr>
+          <p:cNvPr id="10" name="Picture 9" descr="zundamon-an.gif"/>
+          <p:cNvPicPr>
+            <a:picLocks noChangeAspect="1"/>
+          </p:cNvPicPr>
+          <p:nvPr/>
+        </p:nvPicPr>
+        <p:blipFill>
+          <a:blip r:embed="rId4"/>
+          <a:stretch>
+            <a:fillRect/>
+          </a:stretch>
+        </p:blipFill>
+        <p:spPr>
+          <a:xfrm>
+            <a:off x="3429000" y="7699248"/>
+            <a:ext cx="2011680" cy="2011680"/>
+          </a:xfrm>
+          <a:prstGeom prst="rect">
+            <a:avLst/>
+          </a:prstGeom>
+        </p:spPr>
+      </p:pic>
     </p:spTree>
   </p:cSld>
   <p:clrMapOvr>
@@ -4492,6 +4588,30 @@
           </a:p>
         </p:txBody>
       </p:sp>
+      <p:pic>
+        <p:nvPicPr>
+          <p:cNvPr id="10" name="Picture 9" descr="zundamon-an.gif"/>
+          <p:cNvPicPr>
+            <a:picLocks noChangeAspect="1"/>
+          </p:cNvPicPr>
+          <p:nvPr/>
+        </p:nvPicPr>
+        <p:blipFill>
+          <a:blip r:embed="rId4"/>
+          <a:stretch>
+            <a:fillRect/>
+          </a:stretch>
+        </p:blipFill>
+        <p:spPr>
+          <a:xfrm>
+            <a:off x="3429000" y="7699248"/>
+            <a:ext cx="2011680" cy="2011680"/>
+          </a:xfrm>
+          <a:prstGeom prst="rect">
+            <a:avLst/>
+          </a:prstGeom>
+        </p:spPr>
+      </p:pic>
     </p:spTree>
   </p:cSld>
   <p:clrMapOvr>
@@ -4862,6 +4982,30 @@
           </a:p>
         </p:txBody>
       </p:sp>
+      <p:pic>
+        <p:nvPicPr>
+          <p:cNvPr id="12" name="Picture 11" descr="zundamon-an.gif"/>
+          <p:cNvPicPr>
+            <a:picLocks noChangeAspect="1"/>
+          </p:cNvPicPr>
+          <p:nvPr/>
+        </p:nvPicPr>
+        <p:blipFill>
+          <a:blip r:embed="rId4"/>
+          <a:stretch>
+            <a:fillRect/>
+          </a:stretch>
+        </p:blipFill>
+        <p:spPr>
+          <a:xfrm>
+            <a:off x="3429000" y="7699248"/>
+            <a:ext cx="2011680" cy="2011680"/>
+          </a:xfrm>
+          <a:prstGeom prst="rect">
+            <a:avLst/>
+          </a:prstGeom>
+        </p:spPr>
+      </p:pic>
     </p:spTree>
   </p:cSld>
   <p:clrMapOvr>
@@ -5065,6 +5209,30 @@
           </a:p>
         </p:txBody>
       </p:sp>
+      <p:pic>
+        <p:nvPicPr>
+          <p:cNvPr id="7" name="Picture 6" descr="zundamon-an.gif"/>
+          <p:cNvPicPr>
+            <a:picLocks noChangeAspect="1"/>
+          </p:cNvPicPr>
+          <p:nvPr/>
+        </p:nvPicPr>
+        <p:blipFill>
+          <a:blip r:embed="rId2"/>
+          <a:stretch>
+            <a:fillRect/>
+          </a:stretch>
+        </p:blipFill>
+        <p:spPr>
+          <a:xfrm>
+            <a:off x="3429000" y="7699248"/>
+            <a:ext cx="2011680" cy="2011680"/>
+          </a:xfrm>
+          <a:prstGeom prst="rect">
+            <a:avLst/>
+          </a:prstGeom>
+        </p:spPr>
+      </p:pic>
     </p:spTree>
   </p:cSld>
   <p:clrMapOvr>

--- a/youtube_short_20260531.pptx
+++ b/youtube_short_20260531.pptx
@@ -3316,7 +3316,7 @@
                 </a:solidFill>
                 <a:latin typeface="Arial"/>
               </a:rPr>
-              <a:t>2026年05月30日</a:t>
+              <a:t>2026年05月31日</a:t>
             </a:r>
           </a:p>
         </p:txBody>
@@ -3530,7 +3530,7 @@
                 </a:solidFill>
                 <a:latin typeface="Arial"/>
               </a:rPr>
-              <a:t>なにわ男子 - Celebrate [Official Music Video]</a:t>
+              <a:t>飛ぶ時 / Vaundy：MUSIC VIDEO</a:t>
             </a:r>
           </a:p>
         </p:txBody>
@@ -3565,7 +3565,7 @@
                 </a:solidFill>
                 <a:latin typeface="Arial"/>
               </a:rPr>
-              <a:t>📺 なにわ男子</a:t>
+              <a:t>📺 Vaundy</a:t>
             </a:r>
           </a:p>
         </p:txBody>
@@ -3600,7 +3600,7 @@
                 </a:solidFill>
                 <a:latin typeface="Arial"/>
               </a:rPr>
-              <a:t>👁 34万回　👍 3万</a:t>
+              <a:t>👁 36万回　👍 1万</a:t>
             </a:r>
           </a:p>
         </p:txBody>
@@ -3838,7 +3838,7 @@
                 </a:solidFill>
                 <a:latin typeface="Arial"/>
               </a:rPr>
-              <a:t>【マインクラフト】全ての行動がポイントになる可能性がある世界【日常組】</a:t>
+              <a:t>MOBの中身が見れるマインクラフト【 マイクラ / マインクラフト 】</a:t>
             </a:r>
           </a:p>
         </p:txBody>
@@ -3873,7 +3873,7 @@
                 </a:solidFill>
                 <a:latin typeface="Arial"/>
               </a:rPr>
-              <a:t>📺 日常組</a:t>
+              <a:t>📺 ウォーターチャレンジ</a:t>
             </a:r>
           </a:p>
         </p:txBody>
@@ -3908,7 +3908,7 @@
                 </a:solidFill>
                 <a:latin typeface="Arial"/>
               </a:rPr>
-              <a:t>👁 50万回　👍 1万</a:t>
+              <a:t>👁 16万回　👍 3,352</a:t>
             </a:r>
           </a:p>
         </p:txBody>
@@ -4146,7 +4146,7 @@
                 </a:solidFill>
                 <a:latin typeface="Arial"/>
               </a:rPr>
-              <a:t>きゃりーぱみゅぱみゅ - キミに100パーセント / THE FIRST TAK…</a:t>
+              <a:t>REAL-T - "  脛の傷 "  (Prod. 理貴)</a:t>
             </a:r>
           </a:p>
         </p:txBody>
@@ -4181,7 +4181,7 @@
                 </a:solidFill>
                 <a:latin typeface="Arial"/>
               </a:rPr>
-              <a:t>📺 THE FIRST TAKE</a:t>
+              <a:t>📺 REAL-T</a:t>
             </a:r>
           </a:p>
         </p:txBody>
@@ -4216,7 +4216,7 @@
                 </a:solidFill>
                 <a:latin typeface="Arial"/>
               </a:rPr>
-              <a:t>👁 63万回　👍 3万</a:t>
+              <a:t>👁 4万回　👍 2,360</a:t>
             </a:r>
           </a:p>
         </p:txBody>
@@ -4454,7 +4454,7 @@
                 </a:solidFill>
                 <a:latin typeface="Arial"/>
               </a:rPr>
-              <a:t>【4人実況】NGワードを言ったら「仲間が死ぬ」おもしろホラーゲーム『 Curse…</a:t>
+              <a:t>【ヒカコレ】ヒカキン、初めてのトモコレ実況 #1『 トモダチコレクション わくわ…</a:t>
             </a:r>
           </a:p>
         </p:txBody>
@@ -4489,7 +4489,7 @@
                 </a:solidFill>
                 <a:latin typeface="Arial"/>
               </a:rPr>
-              <a:t>📺 キヨ。</a:t>
+              <a:t>📺 HikakinGames</a:t>
             </a:r>
           </a:p>
         </p:txBody>
@@ -4524,7 +4524,7 @@
                 </a:solidFill>
                 <a:latin typeface="Arial"/>
               </a:rPr>
-              <a:t>👁 55万回　👍 1万</a:t>
+              <a:t>👁 19万回　👍 1万</a:t>
             </a:r>
           </a:p>
         </p:txBody>
@@ -4918,7 +4918,7 @@
                 </a:solidFill>
                 <a:latin typeface="Arial"/>
               </a:rPr>
-              <a:t>👁 92万回　👍 8万</a:t>
+              <a:t>👁 147万回　👍 9万</a:t>
             </a:r>
           </a:p>
         </p:txBody>

--- a/youtube_short_20260531.pptx
+++ b/youtube_short_20260531.pptx
@@ -3621,7 +3621,7 @@
         </p:blipFill>
         <p:spPr>
           <a:xfrm>
-            <a:off x="4023360" y="8046720"/>
+            <a:off x="91440" y="8046720"/>
             <a:ext cx="1280160" cy="1280160"/>
           </a:xfrm>
           <a:prstGeom prst="rect">
@@ -3637,7 +3637,7 @@
         </p:nvSpPr>
         <p:spPr>
           <a:xfrm>
-            <a:off x="182880" y="8321040"/>
+            <a:off x="1463040" y="8321040"/>
             <a:ext cx="3840480" cy="365760"/>
           </a:xfrm>
           <a:prstGeom prst="rect">
@@ -3929,7 +3929,7 @@
         </p:blipFill>
         <p:spPr>
           <a:xfrm>
-            <a:off x="4023360" y="8046720"/>
+            <a:off x="91440" y="8046720"/>
             <a:ext cx="1280160" cy="1280160"/>
           </a:xfrm>
           <a:prstGeom prst="rect">
@@ -3945,7 +3945,7 @@
         </p:nvSpPr>
         <p:spPr>
           <a:xfrm>
-            <a:off x="182880" y="8321040"/>
+            <a:off x="1463040" y="8321040"/>
             <a:ext cx="3840480" cy="365760"/>
           </a:xfrm>
           <a:prstGeom prst="rect">
@@ -4237,7 +4237,7 @@
         </p:blipFill>
         <p:spPr>
           <a:xfrm>
-            <a:off x="4023360" y="8046720"/>
+            <a:off x="91440" y="8046720"/>
             <a:ext cx="1280160" cy="1280160"/>
           </a:xfrm>
           <a:prstGeom prst="rect">
@@ -4253,7 +4253,7 @@
         </p:nvSpPr>
         <p:spPr>
           <a:xfrm>
-            <a:off x="182880" y="8321040"/>
+            <a:off x="1463040" y="8321040"/>
             <a:ext cx="3840480" cy="365760"/>
           </a:xfrm>
           <a:prstGeom prst="rect">
@@ -4545,7 +4545,7 @@
         </p:blipFill>
         <p:spPr>
           <a:xfrm>
-            <a:off x="4023360" y="8046720"/>
+            <a:off x="91440" y="8046720"/>
             <a:ext cx="1280160" cy="1280160"/>
           </a:xfrm>
           <a:prstGeom prst="rect">
@@ -4561,7 +4561,7 @@
         </p:nvSpPr>
         <p:spPr>
           <a:xfrm>
-            <a:off x="182880" y="8321040"/>
+            <a:off x="1463040" y="8321040"/>
             <a:ext cx="3840480" cy="365760"/>
           </a:xfrm>
           <a:prstGeom prst="rect">
@@ -4939,7 +4939,7 @@
         </p:blipFill>
         <p:spPr>
           <a:xfrm>
-            <a:off x="1920240" y="7772400"/>
+            <a:off x="91440" y="7772400"/>
             <a:ext cx="1645920" cy="1645920"/>
           </a:xfrm>
           <a:prstGeom prst="rect">
@@ -4955,8 +4955,8 @@
         </p:nvSpPr>
         <p:spPr>
           <a:xfrm>
-            <a:off x="0" y="9235440"/>
-            <a:ext cx="5486400" cy="365760"/>
+            <a:off x="1828800" y="8321040"/>
+            <a:ext cx="3566160" cy="365760"/>
           </a:xfrm>
           <a:prstGeom prst="rect">
             <a:avLst/>
@@ -4969,7 +4969,7 @@
           </a:bodyPr>
           <a:lstStyle/>
           <a:p>
-            <a:pPr algn="ctr"/>
+            <a:pPr algn="l"/>
             <a:r>
               <a:rPr sz="1200" b="0">
                 <a:solidFill>
